--- a/我要一心稱謝你.pptx
+++ b/我要一心稱謝你.pptx
@@ -168,7 +168,7 @@
           <a:lstStyle/>
           <a:p>
             <a:r>
-              <a:rPr lang="en-US" altLang="zh-TW" smtClean="0"/>
+              <a:rPr lang="en-US" altLang="zh-TW"/>
               <a:t>Click to edit Master title style</a:t>
             </a:r>
             <a:endParaRPr lang="zh-TW" altLang="en-US"/>
@@ -287,7 +287,7 @@
           </a:lstStyle>
           <a:p>
             <a:r>
-              <a:rPr lang="en-US" altLang="zh-TW" smtClean="0"/>
+              <a:rPr lang="en-US" altLang="zh-TW"/>
               <a:t>Click to edit Master subtitle style</a:t>
             </a:r>
             <a:endParaRPr lang="zh-TW" altLang="en-US"/>
@@ -311,7 +311,7 @@
           <a:p>
             <a:fld id="{58A801DE-A84B-4B0E-9952-CA2C35DE68C4}" type="datetimeFigureOut">
               <a:rPr lang="zh-TW" altLang="en-US" smtClean="0"/>
-              <a:t>2020/11/28</a:t>
+              <a:t>2024/4/6</a:t>
             </a:fld>
             <a:endParaRPr lang="zh-TW" altLang="en-US"/>
           </a:p>
@@ -405,7 +405,7 @@
           <a:lstStyle/>
           <a:p>
             <a:r>
-              <a:rPr lang="en-US" altLang="zh-TW" smtClean="0"/>
+              <a:rPr lang="en-US" altLang="zh-TW"/>
               <a:t>Click to edit Master title style</a:t>
             </a:r>
             <a:endParaRPr lang="zh-TW" altLang="en-US"/>
@@ -429,35 +429,35 @@
           <a:p>
             <a:pPr lvl="0"/>
             <a:r>
-              <a:rPr lang="en-US" altLang="zh-TW" smtClean="0"/>
+              <a:rPr lang="en-US" altLang="zh-TW"/>
               <a:t>Edit Master text styles</a:t>
             </a:r>
           </a:p>
           <a:p>
             <a:pPr lvl="1"/>
             <a:r>
-              <a:rPr lang="en-US" altLang="zh-TW" smtClean="0"/>
+              <a:rPr lang="en-US" altLang="zh-TW"/>
               <a:t>Second level</a:t>
             </a:r>
           </a:p>
           <a:p>
             <a:pPr lvl="2"/>
             <a:r>
-              <a:rPr lang="en-US" altLang="zh-TW" smtClean="0"/>
+              <a:rPr lang="en-US" altLang="zh-TW"/>
               <a:t>Third level</a:t>
             </a:r>
           </a:p>
           <a:p>
             <a:pPr lvl="3"/>
             <a:r>
-              <a:rPr lang="en-US" altLang="zh-TW" smtClean="0"/>
+              <a:rPr lang="en-US" altLang="zh-TW"/>
               <a:t>Fourth level</a:t>
             </a:r>
           </a:p>
           <a:p>
             <a:pPr lvl="4"/>
             <a:r>
-              <a:rPr lang="en-US" altLang="zh-TW" smtClean="0"/>
+              <a:rPr lang="en-US" altLang="zh-TW"/>
               <a:t>Fifth level</a:t>
             </a:r>
             <a:endParaRPr lang="zh-TW" altLang="en-US"/>
@@ -481,7 +481,7 @@
           <a:p>
             <a:fld id="{58A801DE-A84B-4B0E-9952-CA2C35DE68C4}" type="datetimeFigureOut">
               <a:rPr lang="zh-TW" altLang="en-US" smtClean="0"/>
-              <a:t>2020/11/28</a:t>
+              <a:t>2024/4/6</a:t>
             </a:fld>
             <a:endParaRPr lang="zh-TW" altLang="en-US"/>
           </a:p>
@@ -580,7 +580,7 @@
           <a:lstStyle/>
           <a:p>
             <a:r>
-              <a:rPr lang="en-US" altLang="zh-TW" smtClean="0"/>
+              <a:rPr lang="en-US" altLang="zh-TW"/>
               <a:t>Click to edit Master title style</a:t>
             </a:r>
             <a:endParaRPr lang="zh-TW" altLang="en-US"/>
@@ -609,35 +609,35 @@
           <a:p>
             <a:pPr lvl="0"/>
             <a:r>
-              <a:rPr lang="en-US" altLang="zh-TW" smtClean="0"/>
+              <a:rPr lang="en-US" altLang="zh-TW"/>
               <a:t>Edit Master text styles</a:t>
             </a:r>
           </a:p>
           <a:p>
             <a:pPr lvl="1"/>
             <a:r>
-              <a:rPr lang="en-US" altLang="zh-TW" smtClean="0"/>
+              <a:rPr lang="en-US" altLang="zh-TW"/>
               <a:t>Second level</a:t>
             </a:r>
           </a:p>
           <a:p>
             <a:pPr lvl="2"/>
             <a:r>
-              <a:rPr lang="en-US" altLang="zh-TW" smtClean="0"/>
+              <a:rPr lang="en-US" altLang="zh-TW"/>
               <a:t>Third level</a:t>
             </a:r>
           </a:p>
           <a:p>
             <a:pPr lvl="3"/>
             <a:r>
-              <a:rPr lang="en-US" altLang="zh-TW" smtClean="0"/>
+              <a:rPr lang="en-US" altLang="zh-TW"/>
               <a:t>Fourth level</a:t>
             </a:r>
           </a:p>
           <a:p>
             <a:pPr lvl="4"/>
             <a:r>
-              <a:rPr lang="en-US" altLang="zh-TW" smtClean="0"/>
+              <a:rPr lang="en-US" altLang="zh-TW"/>
               <a:t>Fifth level</a:t>
             </a:r>
             <a:endParaRPr lang="zh-TW" altLang="en-US"/>
@@ -661,7 +661,7 @@
           <a:p>
             <a:fld id="{58A801DE-A84B-4B0E-9952-CA2C35DE68C4}" type="datetimeFigureOut">
               <a:rPr lang="zh-TW" altLang="en-US" smtClean="0"/>
-              <a:t>2020/11/28</a:t>
+              <a:t>2024/4/6</a:t>
             </a:fld>
             <a:endParaRPr lang="zh-TW" altLang="en-US"/>
           </a:p>
@@ -755,7 +755,7 @@
           <a:lstStyle/>
           <a:p>
             <a:r>
-              <a:rPr lang="en-US" altLang="zh-TW" smtClean="0"/>
+              <a:rPr lang="en-US" altLang="zh-TW"/>
               <a:t>Click to edit Master title style</a:t>
             </a:r>
             <a:endParaRPr lang="zh-TW" altLang="en-US"/>
@@ -779,35 +779,35 @@
           <a:p>
             <a:pPr lvl="0"/>
             <a:r>
-              <a:rPr lang="en-US" altLang="zh-TW" smtClean="0"/>
+              <a:rPr lang="en-US" altLang="zh-TW"/>
               <a:t>Edit Master text styles</a:t>
             </a:r>
           </a:p>
           <a:p>
             <a:pPr lvl="1"/>
             <a:r>
-              <a:rPr lang="en-US" altLang="zh-TW" smtClean="0"/>
+              <a:rPr lang="en-US" altLang="zh-TW"/>
               <a:t>Second level</a:t>
             </a:r>
           </a:p>
           <a:p>
             <a:pPr lvl="2"/>
             <a:r>
-              <a:rPr lang="en-US" altLang="zh-TW" smtClean="0"/>
+              <a:rPr lang="en-US" altLang="zh-TW"/>
               <a:t>Third level</a:t>
             </a:r>
           </a:p>
           <a:p>
             <a:pPr lvl="3"/>
             <a:r>
-              <a:rPr lang="en-US" altLang="zh-TW" smtClean="0"/>
+              <a:rPr lang="en-US" altLang="zh-TW"/>
               <a:t>Fourth level</a:t>
             </a:r>
           </a:p>
           <a:p>
             <a:pPr lvl="4"/>
             <a:r>
-              <a:rPr lang="en-US" altLang="zh-TW" smtClean="0"/>
+              <a:rPr lang="en-US" altLang="zh-TW"/>
               <a:t>Fifth level</a:t>
             </a:r>
             <a:endParaRPr lang="zh-TW" altLang="en-US"/>
@@ -831,7 +831,7 @@
           <a:p>
             <a:fld id="{58A801DE-A84B-4B0E-9952-CA2C35DE68C4}" type="datetimeFigureOut">
               <a:rPr lang="zh-TW" altLang="en-US" smtClean="0"/>
-              <a:t>2020/11/28</a:t>
+              <a:t>2024/4/6</a:t>
             </a:fld>
             <a:endParaRPr lang="zh-TW" altLang="en-US"/>
           </a:p>
@@ -934,7 +934,7 @@
           </a:lstStyle>
           <a:p>
             <a:r>
-              <a:rPr lang="en-US" altLang="zh-TW" smtClean="0"/>
+              <a:rPr lang="en-US" altLang="zh-TW"/>
               <a:t>Click to edit Master title style</a:t>
             </a:r>
             <a:endParaRPr lang="zh-TW" altLang="en-US"/>
@@ -1054,7 +1054,7 @@
           <a:p>
             <a:pPr lvl="0"/>
             <a:r>
-              <a:rPr lang="en-US" altLang="zh-TW" smtClean="0"/>
+              <a:rPr lang="en-US" altLang="zh-TW"/>
               <a:t>Edit Master text styles</a:t>
             </a:r>
           </a:p>
@@ -1077,7 +1077,7 @@
           <a:p>
             <a:fld id="{58A801DE-A84B-4B0E-9952-CA2C35DE68C4}" type="datetimeFigureOut">
               <a:rPr lang="zh-TW" altLang="en-US" smtClean="0"/>
-              <a:t>2020/11/28</a:t>
+              <a:t>2024/4/6</a:t>
             </a:fld>
             <a:endParaRPr lang="zh-TW" altLang="en-US"/>
           </a:p>
@@ -1171,7 +1171,7 @@
           <a:lstStyle/>
           <a:p>
             <a:r>
-              <a:rPr lang="en-US" altLang="zh-TW" smtClean="0"/>
+              <a:rPr lang="en-US" altLang="zh-TW"/>
               <a:t>Click to edit Master title style</a:t>
             </a:r>
             <a:endParaRPr lang="zh-TW" altLang="en-US"/>
@@ -1228,35 +1228,35 @@
           <a:p>
             <a:pPr lvl="0"/>
             <a:r>
-              <a:rPr lang="en-US" altLang="zh-TW" smtClean="0"/>
+              <a:rPr lang="en-US" altLang="zh-TW"/>
               <a:t>Edit Master text styles</a:t>
             </a:r>
           </a:p>
           <a:p>
             <a:pPr lvl="1"/>
             <a:r>
-              <a:rPr lang="en-US" altLang="zh-TW" smtClean="0"/>
+              <a:rPr lang="en-US" altLang="zh-TW"/>
               <a:t>Second level</a:t>
             </a:r>
           </a:p>
           <a:p>
             <a:pPr lvl="2"/>
             <a:r>
-              <a:rPr lang="en-US" altLang="zh-TW" smtClean="0"/>
+              <a:rPr lang="en-US" altLang="zh-TW"/>
               <a:t>Third level</a:t>
             </a:r>
           </a:p>
           <a:p>
             <a:pPr lvl="3"/>
             <a:r>
-              <a:rPr lang="en-US" altLang="zh-TW" smtClean="0"/>
+              <a:rPr lang="en-US" altLang="zh-TW"/>
               <a:t>Fourth level</a:t>
             </a:r>
           </a:p>
           <a:p>
             <a:pPr lvl="4"/>
             <a:r>
-              <a:rPr lang="en-US" altLang="zh-TW" smtClean="0"/>
+              <a:rPr lang="en-US" altLang="zh-TW"/>
               <a:t>Fifth level</a:t>
             </a:r>
             <a:endParaRPr lang="zh-TW" altLang="en-US"/>
@@ -1313,35 +1313,35 @@
           <a:p>
             <a:pPr lvl="0"/>
             <a:r>
-              <a:rPr lang="en-US" altLang="zh-TW" smtClean="0"/>
+              <a:rPr lang="en-US" altLang="zh-TW"/>
               <a:t>Edit Master text styles</a:t>
             </a:r>
           </a:p>
           <a:p>
             <a:pPr lvl="1"/>
             <a:r>
-              <a:rPr lang="en-US" altLang="zh-TW" smtClean="0"/>
+              <a:rPr lang="en-US" altLang="zh-TW"/>
               <a:t>Second level</a:t>
             </a:r>
           </a:p>
           <a:p>
             <a:pPr lvl="2"/>
             <a:r>
-              <a:rPr lang="en-US" altLang="zh-TW" smtClean="0"/>
+              <a:rPr lang="en-US" altLang="zh-TW"/>
               <a:t>Third level</a:t>
             </a:r>
           </a:p>
           <a:p>
             <a:pPr lvl="3"/>
             <a:r>
-              <a:rPr lang="en-US" altLang="zh-TW" smtClean="0"/>
+              <a:rPr lang="en-US" altLang="zh-TW"/>
               <a:t>Fourth level</a:t>
             </a:r>
           </a:p>
           <a:p>
             <a:pPr lvl="4"/>
             <a:r>
-              <a:rPr lang="en-US" altLang="zh-TW" smtClean="0"/>
+              <a:rPr lang="en-US" altLang="zh-TW"/>
               <a:t>Fifth level</a:t>
             </a:r>
             <a:endParaRPr lang="zh-TW" altLang="en-US"/>
@@ -1365,7 +1365,7 @@
           <a:p>
             <a:fld id="{58A801DE-A84B-4B0E-9952-CA2C35DE68C4}" type="datetimeFigureOut">
               <a:rPr lang="zh-TW" altLang="en-US" smtClean="0"/>
-              <a:t>2020/11/28</a:t>
+              <a:t>2024/4/6</a:t>
             </a:fld>
             <a:endParaRPr lang="zh-TW" altLang="en-US"/>
           </a:p>
@@ -1463,7 +1463,7 @@
           </a:lstStyle>
           <a:p>
             <a:r>
-              <a:rPr lang="en-US" altLang="zh-TW" smtClean="0"/>
+              <a:rPr lang="en-US" altLang="zh-TW"/>
               <a:t>Click to edit Master title style</a:t>
             </a:r>
             <a:endParaRPr lang="zh-TW" altLang="en-US"/>
@@ -1529,7 +1529,7 @@
           <a:p>
             <a:pPr lvl="0"/>
             <a:r>
-              <a:rPr lang="en-US" altLang="zh-TW" smtClean="0"/>
+              <a:rPr lang="en-US" altLang="zh-TW"/>
               <a:t>Edit Master text styles</a:t>
             </a:r>
           </a:p>
@@ -1585,35 +1585,35 @@
           <a:p>
             <a:pPr lvl="0"/>
             <a:r>
-              <a:rPr lang="en-US" altLang="zh-TW" smtClean="0"/>
+              <a:rPr lang="en-US" altLang="zh-TW"/>
               <a:t>Edit Master text styles</a:t>
             </a:r>
           </a:p>
           <a:p>
             <a:pPr lvl="1"/>
             <a:r>
-              <a:rPr lang="en-US" altLang="zh-TW" smtClean="0"/>
+              <a:rPr lang="en-US" altLang="zh-TW"/>
               <a:t>Second level</a:t>
             </a:r>
           </a:p>
           <a:p>
             <a:pPr lvl="2"/>
             <a:r>
-              <a:rPr lang="en-US" altLang="zh-TW" smtClean="0"/>
+              <a:rPr lang="en-US" altLang="zh-TW"/>
               <a:t>Third level</a:t>
             </a:r>
           </a:p>
           <a:p>
             <a:pPr lvl="3"/>
             <a:r>
-              <a:rPr lang="en-US" altLang="zh-TW" smtClean="0"/>
+              <a:rPr lang="en-US" altLang="zh-TW"/>
               <a:t>Fourth level</a:t>
             </a:r>
           </a:p>
           <a:p>
             <a:pPr lvl="4"/>
             <a:r>
-              <a:rPr lang="en-US" altLang="zh-TW" smtClean="0"/>
+              <a:rPr lang="en-US" altLang="zh-TW"/>
               <a:t>Fifth level</a:t>
             </a:r>
             <a:endParaRPr lang="zh-TW" altLang="en-US"/>
@@ -1679,7 +1679,7 @@
           <a:p>
             <a:pPr lvl="0"/>
             <a:r>
-              <a:rPr lang="en-US" altLang="zh-TW" smtClean="0"/>
+              <a:rPr lang="en-US" altLang="zh-TW"/>
               <a:t>Edit Master text styles</a:t>
             </a:r>
           </a:p>
@@ -1735,35 +1735,35 @@
           <a:p>
             <a:pPr lvl="0"/>
             <a:r>
-              <a:rPr lang="en-US" altLang="zh-TW" smtClean="0"/>
+              <a:rPr lang="en-US" altLang="zh-TW"/>
               <a:t>Edit Master text styles</a:t>
             </a:r>
           </a:p>
           <a:p>
             <a:pPr lvl="1"/>
             <a:r>
-              <a:rPr lang="en-US" altLang="zh-TW" smtClean="0"/>
+              <a:rPr lang="en-US" altLang="zh-TW"/>
               <a:t>Second level</a:t>
             </a:r>
           </a:p>
           <a:p>
             <a:pPr lvl="2"/>
             <a:r>
-              <a:rPr lang="en-US" altLang="zh-TW" smtClean="0"/>
+              <a:rPr lang="en-US" altLang="zh-TW"/>
               <a:t>Third level</a:t>
             </a:r>
           </a:p>
           <a:p>
             <a:pPr lvl="3"/>
             <a:r>
-              <a:rPr lang="en-US" altLang="zh-TW" smtClean="0"/>
+              <a:rPr lang="en-US" altLang="zh-TW"/>
               <a:t>Fourth level</a:t>
             </a:r>
           </a:p>
           <a:p>
             <a:pPr lvl="4"/>
             <a:r>
-              <a:rPr lang="en-US" altLang="zh-TW" smtClean="0"/>
+              <a:rPr lang="en-US" altLang="zh-TW"/>
               <a:t>Fifth level</a:t>
             </a:r>
             <a:endParaRPr lang="zh-TW" altLang="en-US"/>
@@ -1787,7 +1787,7 @@
           <a:p>
             <a:fld id="{58A801DE-A84B-4B0E-9952-CA2C35DE68C4}" type="datetimeFigureOut">
               <a:rPr lang="zh-TW" altLang="en-US" smtClean="0"/>
-              <a:t>2020/11/28</a:t>
+              <a:t>2024/4/6</a:t>
             </a:fld>
             <a:endParaRPr lang="zh-TW" altLang="en-US"/>
           </a:p>
@@ -1881,7 +1881,7 @@
           <a:lstStyle/>
           <a:p>
             <a:r>
-              <a:rPr lang="en-US" altLang="zh-TW" smtClean="0"/>
+              <a:rPr lang="en-US" altLang="zh-TW"/>
               <a:t>Click to edit Master title style</a:t>
             </a:r>
             <a:endParaRPr lang="zh-TW" altLang="en-US"/>
@@ -1905,7 +1905,7 @@
           <a:p>
             <a:fld id="{58A801DE-A84B-4B0E-9952-CA2C35DE68C4}" type="datetimeFigureOut">
               <a:rPr lang="zh-TW" altLang="en-US" smtClean="0"/>
-              <a:t>2020/11/28</a:t>
+              <a:t>2024/4/6</a:t>
             </a:fld>
             <a:endParaRPr lang="zh-TW" altLang="en-US"/>
           </a:p>
@@ -2000,7 +2000,7 @@
           <a:p>
             <a:fld id="{58A801DE-A84B-4B0E-9952-CA2C35DE68C4}" type="datetimeFigureOut">
               <a:rPr lang="zh-TW" altLang="en-US" smtClean="0"/>
-              <a:t>2020/11/28</a:t>
+              <a:t>2024/4/6</a:t>
             </a:fld>
             <a:endParaRPr lang="zh-TW" altLang="en-US"/>
           </a:p>
@@ -2103,7 +2103,7 @@
           </a:lstStyle>
           <a:p>
             <a:r>
-              <a:rPr lang="en-US" altLang="zh-TW" smtClean="0"/>
+              <a:rPr lang="en-US" altLang="zh-TW"/>
               <a:t>Click to edit Master title style</a:t>
             </a:r>
             <a:endParaRPr lang="zh-TW" altLang="en-US"/>
@@ -2160,35 +2160,35 @@
           <a:p>
             <a:pPr lvl="0"/>
             <a:r>
-              <a:rPr lang="en-US" altLang="zh-TW" smtClean="0"/>
+              <a:rPr lang="en-US" altLang="zh-TW"/>
               <a:t>Edit Master text styles</a:t>
             </a:r>
           </a:p>
           <a:p>
             <a:pPr lvl="1"/>
             <a:r>
-              <a:rPr lang="en-US" altLang="zh-TW" smtClean="0"/>
+              <a:rPr lang="en-US" altLang="zh-TW"/>
               <a:t>Second level</a:t>
             </a:r>
           </a:p>
           <a:p>
             <a:pPr lvl="2"/>
             <a:r>
-              <a:rPr lang="en-US" altLang="zh-TW" smtClean="0"/>
+              <a:rPr lang="en-US" altLang="zh-TW"/>
               <a:t>Third level</a:t>
             </a:r>
           </a:p>
           <a:p>
             <a:pPr lvl="3"/>
             <a:r>
-              <a:rPr lang="en-US" altLang="zh-TW" smtClean="0"/>
+              <a:rPr lang="en-US" altLang="zh-TW"/>
               <a:t>Fourth level</a:t>
             </a:r>
           </a:p>
           <a:p>
             <a:pPr lvl="4"/>
             <a:r>
-              <a:rPr lang="en-US" altLang="zh-TW" smtClean="0"/>
+              <a:rPr lang="en-US" altLang="zh-TW"/>
               <a:t>Fifth level</a:t>
             </a:r>
             <a:endParaRPr lang="zh-TW" altLang="en-US"/>
@@ -2254,7 +2254,7 @@
           <a:p>
             <a:pPr lvl="0"/>
             <a:r>
-              <a:rPr lang="en-US" altLang="zh-TW" smtClean="0"/>
+              <a:rPr lang="en-US" altLang="zh-TW"/>
               <a:t>Edit Master text styles</a:t>
             </a:r>
           </a:p>
@@ -2277,7 +2277,7 @@
           <a:p>
             <a:fld id="{58A801DE-A84B-4B0E-9952-CA2C35DE68C4}" type="datetimeFigureOut">
               <a:rPr lang="zh-TW" altLang="en-US" smtClean="0"/>
-              <a:t>2020/11/28</a:t>
+              <a:t>2024/4/6</a:t>
             </a:fld>
             <a:endParaRPr lang="zh-TW" altLang="en-US"/>
           </a:p>
@@ -2380,7 +2380,7 @@
           </a:lstStyle>
           <a:p>
             <a:r>
-              <a:rPr lang="en-US" altLang="zh-TW" smtClean="0"/>
+              <a:rPr lang="en-US" altLang="zh-TW"/>
               <a:t>Click to edit Master title style</a:t>
             </a:r>
             <a:endParaRPr lang="zh-TW" altLang="en-US"/>
@@ -2445,7 +2445,7 @@
           </a:lstStyle>
           <a:p>
             <a:r>
-              <a:rPr lang="en-US" altLang="zh-TW" smtClean="0"/>
+              <a:rPr lang="en-US" altLang="zh-TW"/>
               <a:t>Click icon to add picture</a:t>
             </a:r>
             <a:endParaRPr lang="zh-TW" altLang="en-US"/>
@@ -2511,7 +2511,7 @@
           <a:p>
             <a:pPr lvl="0"/>
             <a:r>
-              <a:rPr lang="en-US" altLang="zh-TW" smtClean="0"/>
+              <a:rPr lang="en-US" altLang="zh-TW"/>
               <a:t>Edit Master text styles</a:t>
             </a:r>
           </a:p>
@@ -2534,7 +2534,7 @@
           <a:p>
             <a:fld id="{58A801DE-A84B-4B0E-9952-CA2C35DE68C4}" type="datetimeFigureOut">
               <a:rPr lang="zh-TW" altLang="en-US" smtClean="0"/>
-              <a:t>2020/11/28</a:t>
+              <a:t>2024/4/6</a:t>
             </a:fld>
             <a:endParaRPr lang="zh-TW" altLang="en-US"/>
           </a:p>
@@ -2648,10 +2648,9 @@
           <a:lstStyle/>
           <a:p>
             <a:r>
-              <a:rPr lang="zh-TW" altLang="en-US" smtClean="0"/>
+              <a:rPr lang="zh-TW" altLang="en-US"/>
               <a:t>按一下以編輯母片標題樣式</a:t>
             </a:r>
-            <a:endParaRPr lang="zh-TW" altLang="en-US"/>
           </a:p>
         </p:txBody>
       </p:sp>
@@ -2682,38 +2681,37 @@
           <a:p>
             <a:pPr lvl="0"/>
             <a:r>
-              <a:rPr lang="zh-TW" altLang="en-US" smtClean="0"/>
+              <a:rPr lang="zh-TW" altLang="en-US"/>
               <a:t>按一下以編輯母片文字樣式</a:t>
             </a:r>
           </a:p>
           <a:p>
             <a:pPr lvl="1"/>
             <a:r>
-              <a:rPr lang="zh-TW" altLang="en-US" smtClean="0"/>
+              <a:rPr lang="zh-TW" altLang="en-US"/>
               <a:t>第二層</a:t>
             </a:r>
           </a:p>
           <a:p>
             <a:pPr lvl="2"/>
             <a:r>
-              <a:rPr lang="zh-TW" altLang="en-US" smtClean="0"/>
+              <a:rPr lang="zh-TW" altLang="en-US"/>
               <a:t>第三層</a:t>
             </a:r>
           </a:p>
           <a:p>
             <a:pPr lvl="3"/>
             <a:r>
-              <a:rPr lang="zh-TW" altLang="en-US" smtClean="0"/>
+              <a:rPr lang="zh-TW" altLang="en-US"/>
               <a:t>第四層</a:t>
             </a:r>
           </a:p>
           <a:p>
             <a:pPr lvl="4"/>
             <a:r>
-              <a:rPr lang="zh-TW" altLang="en-US" smtClean="0"/>
+              <a:rPr lang="zh-TW" altLang="en-US"/>
               <a:t>第五層</a:t>
             </a:r>
-            <a:endParaRPr lang="zh-TW" altLang="en-US"/>
           </a:p>
         </p:txBody>
       </p:sp>
@@ -2752,7 +2750,7 @@
           <a:p>
             <a:fld id="{58A801DE-A84B-4B0E-9952-CA2C35DE68C4}" type="datetimeFigureOut">
               <a:rPr lang="zh-TW" altLang="en-US" smtClean="0"/>
-              <a:t>2020/11/28</a:t>
+              <a:t>2024/4/6</a:t>
             </a:fld>
             <a:endParaRPr lang="zh-TW" altLang="en-US"/>
           </a:p>
@@ -3164,10 +3162,10 @@
                 <a:latin typeface="微軟正黑體" pitchFamily="34" charset="-120"/>
                 <a:ea typeface="微軟正黑體" pitchFamily="34" charset="-120"/>
               </a:rPr>
-              <a:t>我</a:t>
-            </a:r>
-            <a:r>
-              <a:rPr lang="zh-TW" altLang="en-US" sz="7200" b="1" i="1" dirty="0">
+              <a:t>我要一心稱謝</a:t>
+            </a:r>
+            <a:r>
+              <a:rPr lang="zh-CN" altLang="en-US" sz="7200" b="1" i="1" dirty="0">
                 <a:solidFill>
                   <a:srgbClr val="000066"/>
                 </a:solidFill>
@@ -3181,24 +3179,7 @@
                 <a:latin typeface="微軟正黑體" pitchFamily="34" charset="-120"/>
                 <a:ea typeface="微軟正黑體" pitchFamily="34" charset="-120"/>
               </a:rPr>
-              <a:t>要一心稱謝</a:t>
-            </a:r>
-            <a:r>
-              <a:rPr lang="zh-CN" altLang="en-US" sz="7200" b="1" i="1" dirty="0">
-                <a:solidFill>
-                  <a:srgbClr val="000066"/>
-                </a:solidFill>
-                <a:effectLst>
-                  <a:outerShdw blurRad="38100" dist="38100" dir="2700000" algn="tl">
-                    <a:srgbClr val="000000">
-                      <a:alpha val="43137"/>
-                    </a:srgbClr>
-                  </a:outerShdw>
-                </a:effectLst>
-                <a:latin typeface="微軟正黑體" pitchFamily="34" charset="-120"/>
-                <a:ea typeface="微軟正黑體" pitchFamily="34" charset="-120"/>
-              </a:rPr>
-              <a:t>袮</a:t>
+              <a:t>祢</a:t>
             </a:r>
             <a:endParaRPr lang="zh-TW" altLang="en-US" sz="7200" b="1" i="1" dirty="0">
               <a:solidFill>
@@ -3290,7 +3271,7 @@
                 <a:latin typeface="微軟正黑體" pitchFamily="34" charset="-120"/>
                 <a:ea typeface="微軟正黑體" pitchFamily="34" charset="-120"/>
               </a:rPr>
-              <a:t>袮</a:t>
+              <a:t>祢</a:t>
             </a:r>
             <a:endParaRPr lang="en-US" altLang="zh-TW" sz="6400" b="1" dirty="0">
               <a:solidFill>
@@ -3322,7 +3303,7 @@
                 <a:latin typeface="微軟正黑體" pitchFamily="34" charset="-120"/>
                 <a:ea typeface="微軟正黑體" pitchFamily="34" charset="-120"/>
               </a:rPr>
-              <a:t>袮</a:t>
+              <a:t>祢</a:t>
             </a:r>
             <a:endParaRPr lang="en-US" altLang="zh-TW" sz="6400" b="1" dirty="0">
               <a:solidFill>
@@ -3330,6 +3311,78 @@
               </a:solidFill>
               <a:latin typeface="微軟正黑體" pitchFamily="34" charset="-120"/>
               <a:ea typeface="微軟正黑體" pitchFamily="34" charset="-120"/>
+            </a:endParaRPr>
+          </a:p>
+        </p:txBody>
+      </p:sp>
+      <p:sp>
+        <p:nvSpPr>
+          <p:cNvPr id="2" name="TextBox 1">
+            <a:extLst>
+              <a:ext uri="{FF2B5EF4-FFF2-40B4-BE49-F238E27FC236}">
+                <a16:creationId xmlns:a16="http://schemas.microsoft.com/office/drawing/2014/main" id="{F5D7176B-FAAB-638A-ABD0-7FF00D1AE7B5}"/>
+              </a:ext>
+            </a:extLst>
+          </p:cNvPr>
+          <p:cNvSpPr txBox="1"/>
+          <p:nvPr/>
+        </p:nvSpPr>
+        <p:spPr>
+          <a:xfrm>
+            <a:off x="0" y="5157192"/>
+            <a:ext cx="12192000" cy="584775"/>
+          </a:xfrm>
+          <a:prstGeom prst="rect">
+            <a:avLst/>
+          </a:prstGeom>
+          <a:noFill/>
+        </p:spPr>
+        <p:txBody>
+          <a:bodyPr wrap="square" rtlCol="0">
+            <a:spAutoFit/>
+          </a:bodyPr>
+          <a:lstStyle/>
+          <a:p>
+            <a:pPr algn="ctr"/>
+            <a:r>
+              <a:rPr lang="en-US" sz="3200" b="1" dirty="0">
+                <a:solidFill>
+                  <a:srgbClr val="000066"/>
+                </a:solidFill>
+                <a:effectLst/>
+                <a:latin typeface="Microsoft JhengHei" panose="020B0604030504040204" pitchFamily="34" charset="-120"/>
+                <a:ea typeface="Microsoft JhengHei" panose="020B0604030504040204" pitchFamily="34" charset="-120"/>
+              </a:rPr>
+              <a:t>( </a:t>
+            </a:r>
+            <a:r>
+              <a:rPr lang="zh-CN" altLang="en-US" sz="3200" b="1" dirty="0">
+                <a:solidFill>
+                  <a:srgbClr val="000066"/>
+                </a:solidFill>
+                <a:effectLst/>
+                <a:latin typeface="Microsoft JhengHei" panose="020B0604030504040204" pitchFamily="34" charset="-120"/>
+                <a:ea typeface="Microsoft JhengHei" panose="020B0604030504040204" pitchFamily="34" charset="-120"/>
+              </a:rPr>
+              <a:t>正歌</a:t>
+            </a:r>
+            <a:r>
+              <a:rPr lang="en-US" sz="3200" b="1" dirty="0">
+                <a:solidFill>
+                  <a:srgbClr val="000066"/>
+                </a:solidFill>
+                <a:effectLst/>
+                <a:latin typeface="Microsoft JhengHei" panose="020B0604030504040204" pitchFamily="34" charset="-120"/>
+                <a:ea typeface="Microsoft JhengHei" panose="020B0604030504040204" pitchFamily="34" charset="-120"/>
+              </a:rPr>
+              <a:t> )</a:t>
+            </a:r>
+            <a:endParaRPr lang="vi-VN" sz="3200" b="1" dirty="0">
+              <a:solidFill>
+                <a:srgbClr val="000066"/>
+              </a:solidFill>
+              <a:effectLst/>
+              <a:ea typeface="Microsoft JhengHei" panose="020B0604030504040204" pitchFamily="34" charset="-120"/>
             </a:endParaRPr>
           </a:p>
         </p:txBody>
@@ -3407,7 +3460,7 @@
                 <a:latin typeface="微軟正黑體" pitchFamily="34" charset="-120"/>
                 <a:ea typeface="微軟正黑體" pitchFamily="34" charset="-120"/>
               </a:rPr>
-              <a:t>袮</a:t>
+              <a:t>祢</a:t>
             </a:r>
             <a:r>
               <a:rPr lang="zh-TW" altLang="en-US" sz="6400" b="1" dirty="0">
@@ -3449,7 +3502,7 @@
                 <a:latin typeface="微軟正黑體" pitchFamily="34" charset="-120"/>
                 <a:ea typeface="微軟正黑體" pitchFamily="34" charset="-120"/>
               </a:rPr>
-              <a:t>袮</a:t>
+              <a:t>祢</a:t>
             </a:r>
             <a:r>
               <a:rPr lang="zh-TW" altLang="en-US" sz="6400" b="1" dirty="0">
@@ -3469,7 +3522,7 @@
                 <a:latin typeface="微軟正黑體" pitchFamily="34" charset="-120"/>
                 <a:ea typeface="微軟正黑體" pitchFamily="34" charset="-120"/>
               </a:rPr>
-              <a:t>袮</a:t>
+              <a:t>祢</a:t>
             </a:r>
             <a:r>
               <a:rPr lang="zh-TW" altLang="en-US" sz="6400" b="1" dirty="0">
@@ -3481,12 +3534,77 @@
               </a:rPr>
               <a:t>名</a:t>
             </a:r>
-            <a:endParaRPr lang="zh-TW" altLang="en-US" sz="6400" b="1" dirty="0">
+          </a:p>
+        </p:txBody>
+      </p:sp>
+      <p:sp>
+        <p:nvSpPr>
+          <p:cNvPr id="2" name="TextBox 1">
+            <a:extLst>
+              <a:ext uri="{FF2B5EF4-FFF2-40B4-BE49-F238E27FC236}">
+                <a16:creationId xmlns:a16="http://schemas.microsoft.com/office/drawing/2014/main" id="{E5F8A2D5-0751-1AB5-0FD5-6C4FD6AA43A2}"/>
+              </a:ext>
+            </a:extLst>
+          </p:cNvPr>
+          <p:cNvSpPr txBox="1"/>
+          <p:nvPr/>
+        </p:nvSpPr>
+        <p:spPr>
+          <a:xfrm>
+            <a:off x="0" y="5157192"/>
+            <a:ext cx="12192000" cy="584775"/>
+          </a:xfrm>
+          <a:prstGeom prst="rect">
+            <a:avLst/>
+          </a:prstGeom>
+          <a:noFill/>
+        </p:spPr>
+        <p:txBody>
+          <a:bodyPr wrap="square" rtlCol="0">
+            <a:spAutoFit/>
+          </a:bodyPr>
+          <a:lstStyle/>
+          <a:p>
+            <a:pPr algn="ctr"/>
+            <a:r>
+              <a:rPr lang="en-US" sz="3200" b="1" dirty="0">
+                <a:solidFill>
+                  <a:srgbClr val="000066"/>
+                </a:solidFill>
+                <a:effectLst/>
+                <a:latin typeface="Microsoft JhengHei" panose="020B0604030504040204" pitchFamily="34" charset="-120"/>
+                <a:ea typeface="Microsoft JhengHei" panose="020B0604030504040204" pitchFamily="34" charset="-120"/>
+              </a:rPr>
+              <a:t>( </a:t>
+            </a:r>
+            <a:r>
+              <a:rPr lang="zh-CN" altLang="en-US" sz="3200" b="1" dirty="0">
+                <a:solidFill>
+                  <a:srgbClr val="000066"/>
+                </a:solidFill>
+                <a:effectLst/>
+                <a:latin typeface="Microsoft JhengHei" panose="020B0604030504040204" pitchFamily="34" charset="-120"/>
+                <a:ea typeface="Microsoft JhengHei" panose="020B0604030504040204" pitchFamily="34" charset="-120"/>
+              </a:rPr>
+              <a:t>正歌</a:t>
+            </a:r>
+            <a:r>
+              <a:rPr lang="en-US" sz="3200" b="1" dirty="0">
+                <a:solidFill>
+                  <a:srgbClr val="000066"/>
+                </a:solidFill>
+                <a:effectLst/>
+                <a:latin typeface="Microsoft JhengHei" panose="020B0604030504040204" pitchFamily="34" charset="-120"/>
+                <a:ea typeface="Microsoft JhengHei" panose="020B0604030504040204" pitchFamily="34" charset="-120"/>
+              </a:rPr>
+              <a:t> )</a:t>
+            </a:r>
+            <a:endParaRPr lang="vi-VN" sz="3200" b="1" dirty="0">
               <a:solidFill>
                 <a:srgbClr val="000066"/>
               </a:solidFill>
-              <a:latin typeface="微軟正黑體" pitchFamily="34" charset="-120"/>
-              <a:ea typeface="微軟正黑體" pitchFamily="34" charset="-120"/>
+              <a:effectLst/>
+              <a:ea typeface="Microsoft JhengHei" panose="020B0604030504040204" pitchFamily="34" charset="-120"/>
             </a:endParaRPr>
           </a:p>
         </p:txBody>
@@ -3586,7 +3704,7 @@
                 <a:latin typeface="微軟正黑體" pitchFamily="34" charset="-120"/>
                 <a:ea typeface="微軟正黑體" pitchFamily="34" charset="-120"/>
               </a:rPr>
-              <a:t>袮</a:t>
+              <a:t>祢</a:t>
             </a:r>
             <a:r>
               <a:rPr lang="zh-TW" altLang="en-US" sz="6400" b="1" dirty="0">
@@ -3604,6 +3722,78 @@
               </a:solidFill>
               <a:latin typeface="微軟正黑體" pitchFamily="34" charset="-120"/>
               <a:ea typeface="微軟正黑體" pitchFamily="34" charset="-120"/>
+            </a:endParaRPr>
+          </a:p>
+        </p:txBody>
+      </p:sp>
+      <p:sp>
+        <p:nvSpPr>
+          <p:cNvPr id="2" name="TextBox 1">
+            <a:extLst>
+              <a:ext uri="{FF2B5EF4-FFF2-40B4-BE49-F238E27FC236}">
+                <a16:creationId xmlns:a16="http://schemas.microsoft.com/office/drawing/2014/main" id="{D37D5FA9-1E70-2833-A015-2AD6ED7EAFA5}"/>
+              </a:ext>
+            </a:extLst>
+          </p:cNvPr>
+          <p:cNvSpPr txBox="1"/>
+          <p:nvPr/>
+        </p:nvSpPr>
+        <p:spPr>
+          <a:xfrm>
+            <a:off x="0" y="5157192"/>
+            <a:ext cx="12192000" cy="584775"/>
+          </a:xfrm>
+          <a:prstGeom prst="rect">
+            <a:avLst/>
+          </a:prstGeom>
+          <a:noFill/>
+        </p:spPr>
+        <p:txBody>
+          <a:bodyPr wrap="square" rtlCol="0">
+            <a:spAutoFit/>
+          </a:bodyPr>
+          <a:lstStyle/>
+          <a:p>
+            <a:pPr algn="ctr"/>
+            <a:r>
+              <a:rPr lang="en-US" sz="3200" b="1" dirty="0">
+                <a:solidFill>
+                  <a:srgbClr val="000066"/>
+                </a:solidFill>
+                <a:effectLst/>
+                <a:latin typeface="Microsoft JhengHei" panose="020B0604030504040204" pitchFamily="34" charset="-120"/>
+                <a:ea typeface="Microsoft JhengHei" panose="020B0604030504040204" pitchFamily="34" charset="-120"/>
+              </a:rPr>
+              <a:t>( </a:t>
+            </a:r>
+            <a:r>
+              <a:rPr lang="zh-CN" altLang="en-US" sz="3200" b="1" dirty="0">
+                <a:solidFill>
+                  <a:srgbClr val="000066"/>
+                </a:solidFill>
+                <a:effectLst/>
+                <a:latin typeface="Microsoft JhengHei" panose="020B0604030504040204" pitchFamily="34" charset="-120"/>
+                <a:ea typeface="Microsoft JhengHei" panose="020B0604030504040204" pitchFamily="34" charset="-120"/>
+              </a:rPr>
+              <a:t>副歌</a:t>
+            </a:r>
+            <a:r>
+              <a:rPr lang="en-US" sz="3200" b="1" dirty="0">
+                <a:solidFill>
+                  <a:srgbClr val="000066"/>
+                </a:solidFill>
+                <a:effectLst/>
+                <a:latin typeface="Microsoft JhengHei" panose="020B0604030504040204" pitchFamily="34" charset="-120"/>
+                <a:ea typeface="Microsoft JhengHei" panose="020B0604030504040204" pitchFamily="34" charset="-120"/>
+              </a:rPr>
+              <a:t> )</a:t>
+            </a:r>
+            <a:endParaRPr lang="vi-VN" sz="3200" b="1" dirty="0">
+              <a:solidFill>
+                <a:srgbClr val="000066"/>
+              </a:solidFill>
+              <a:effectLst/>
+              <a:ea typeface="Microsoft JhengHei" panose="020B0604030504040204" pitchFamily="34" charset="-120"/>
             </a:endParaRPr>
           </a:p>
         </p:txBody>
@@ -3693,7 +3883,7 @@
                 <a:latin typeface="微軟正黑體" pitchFamily="34" charset="-120"/>
                 <a:ea typeface="微軟正黑體" pitchFamily="34" charset="-120"/>
               </a:rPr>
-              <a:t>袮</a:t>
+              <a:t>祢</a:t>
             </a:r>
             <a:r>
               <a:rPr lang="zh-TW" altLang="en-US" sz="6400" b="1" dirty="0">
@@ -3705,6 +3895,78 @@
               </a:rPr>
               <a:t>應許必將我救活</a:t>
             </a:r>
+          </a:p>
+        </p:txBody>
+      </p:sp>
+      <p:sp>
+        <p:nvSpPr>
+          <p:cNvPr id="2" name="TextBox 1">
+            <a:extLst>
+              <a:ext uri="{FF2B5EF4-FFF2-40B4-BE49-F238E27FC236}">
+                <a16:creationId xmlns:a16="http://schemas.microsoft.com/office/drawing/2014/main" id="{A3F4159D-74A4-264B-5C99-C05A109779FA}"/>
+              </a:ext>
+            </a:extLst>
+          </p:cNvPr>
+          <p:cNvSpPr txBox="1"/>
+          <p:nvPr/>
+        </p:nvSpPr>
+        <p:spPr>
+          <a:xfrm>
+            <a:off x="0" y="5157192"/>
+            <a:ext cx="12192000" cy="584775"/>
+          </a:xfrm>
+          <a:prstGeom prst="rect">
+            <a:avLst/>
+          </a:prstGeom>
+          <a:noFill/>
+        </p:spPr>
+        <p:txBody>
+          <a:bodyPr wrap="square" rtlCol="0">
+            <a:spAutoFit/>
+          </a:bodyPr>
+          <a:lstStyle/>
+          <a:p>
+            <a:pPr algn="ctr"/>
+            <a:r>
+              <a:rPr lang="en-US" sz="3200" b="1" dirty="0">
+                <a:solidFill>
+                  <a:srgbClr val="000066"/>
+                </a:solidFill>
+                <a:effectLst/>
+                <a:latin typeface="Microsoft JhengHei" panose="020B0604030504040204" pitchFamily="34" charset="-120"/>
+                <a:ea typeface="Microsoft JhengHei" panose="020B0604030504040204" pitchFamily="34" charset="-120"/>
+              </a:rPr>
+              <a:t>( </a:t>
+            </a:r>
+            <a:r>
+              <a:rPr lang="zh-CN" altLang="en-US" sz="3200" b="1" dirty="0">
+                <a:solidFill>
+                  <a:srgbClr val="000066"/>
+                </a:solidFill>
+                <a:effectLst/>
+                <a:latin typeface="Microsoft JhengHei" panose="020B0604030504040204" pitchFamily="34" charset="-120"/>
+                <a:ea typeface="Microsoft JhengHei" panose="020B0604030504040204" pitchFamily="34" charset="-120"/>
+              </a:rPr>
+              <a:t>副歌</a:t>
+            </a:r>
+            <a:r>
+              <a:rPr lang="en-US" sz="3200" b="1" dirty="0">
+                <a:solidFill>
+                  <a:srgbClr val="000066"/>
+                </a:solidFill>
+                <a:effectLst/>
+                <a:latin typeface="Microsoft JhengHei" panose="020B0604030504040204" pitchFamily="34" charset="-120"/>
+                <a:ea typeface="Microsoft JhengHei" panose="020B0604030504040204" pitchFamily="34" charset="-120"/>
+              </a:rPr>
+              <a:t> )</a:t>
+            </a:r>
+            <a:endParaRPr lang="vi-VN" sz="3200" b="1" dirty="0">
+              <a:solidFill>
+                <a:srgbClr val="000066"/>
+              </a:solidFill>
+              <a:effectLst/>
+              <a:ea typeface="Microsoft JhengHei" panose="020B0604030504040204" pitchFamily="34" charset="-120"/>
+            </a:endParaRPr>
           </a:p>
         </p:txBody>
       </p:sp>
@@ -3803,7 +4065,7 @@
                 <a:latin typeface="微軟正黑體" pitchFamily="34" charset="-120"/>
                 <a:ea typeface="微軟正黑體" pitchFamily="34" charset="-120"/>
               </a:rPr>
-              <a:t>袮</a:t>
+              <a:t>祢</a:t>
             </a:r>
             <a:r>
               <a:rPr lang="zh-TW" altLang="en-US" sz="6400" b="1" dirty="0">
@@ -3821,6 +4083,78 @@
               </a:solidFill>
               <a:latin typeface="微軟正黑體" pitchFamily="34" charset="-120"/>
               <a:ea typeface="微軟正黑體" pitchFamily="34" charset="-120"/>
+            </a:endParaRPr>
+          </a:p>
+        </p:txBody>
+      </p:sp>
+      <p:sp>
+        <p:nvSpPr>
+          <p:cNvPr id="2" name="TextBox 1">
+            <a:extLst>
+              <a:ext uri="{FF2B5EF4-FFF2-40B4-BE49-F238E27FC236}">
+                <a16:creationId xmlns:a16="http://schemas.microsoft.com/office/drawing/2014/main" id="{1F090B6F-F9EF-A26B-8208-C0F57C385046}"/>
+              </a:ext>
+            </a:extLst>
+          </p:cNvPr>
+          <p:cNvSpPr txBox="1"/>
+          <p:nvPr/>
+        </p:nvSpPr>
+        <p:spPr>
+          <a:xfrm>
+            <a:off x="0" y="5157192"/>
+            <a:ext cx="12192000" cy="584775"/>
+          </a:xfrm>
+          <a:prstGeom prst="rect">
+            <a:avLst/>
+          </a:prstGeom>
+          <a:noFill/>
+        </p:spPr>
+        <p:txBody>
+          <a:bodyPr wrap="square" rtlCol="0">
+            <a:spAutoFit/>
+          </a:bodyPr>
+          <a:lstStyle/>
+          <a:p>
+            <a:pPr algn="ctr"/>
+            <a:r>
+              <a:rPr lang="en-US" sz="3200" b="1" dirty="0">
+                <a:solidFill>
+                  <a:srgbClr val="000066"/>
+                </a:solidFill>
+                <a:effectLst/>
+                <a:latin typeface="Microsoft JhengHei" panose="020B0604030504040204" pitchFamily="34" charset="-120"/>
+                <a:ea typeface="Microsoft JhengHei" panose="020B0604030504040204" pitchFamily="34" charset="-120"/>
+              </a:rPr>
+              <a:t>( </a:t>
+            </a:r>
+            <a:r>
+              <a:rPr lang="zh-CN" altLang="en-US" sz="3200" b="1" dirty="0">
+                <a:solidFill>
+                  <a:srgbClr val="000066"/>
+                </a:solidFill>
+                <a:effectLst/>
+                <a:latin typeface="Microsoft JhengHei" panose="020B0604030504040204" pitchFamily="34" charset="-120"/>
+                <a:ea typeface="Microsoft JhengHei" panose="020B0604030504040204" pitchFamily="34" charset="-120"/>
+              </a:rPr>
+              <a:t>副歌</a:t>
+            </a:r>
+            <a:r>
+              <a:rPr lang="en-US" sz="3200" b="1" dirty="0">
+                <a:solidFill>
+                  <a:srgbClr val="000066"/>
+                </a:solidFill>
+                <a:effectLst/>
+                <a:latin typeface="Microsoft JhengHei" panose="020B0604030504040204" pitchFamily="34" charset="-120"/>
+                <a:ea typeface="Microsoft JhengHei" panose="020B0604030504040204" pitchFamily="34" charset="-120"/>
+              </a:rPr>
+              <a:t> )</a:t>
+            </a:r>
+            <a:endParaRPr lang="vi-VN" sz="3200" b="1" dirty="0">
+              <a:solidFill>
+                <a:srgbClr val="000066"/>
+              </a:solidFill>
+              <a:effectLst/>
+              <a:ea typeface="Microsoft JhengHei" panose="020B0604030504040204" pitchFamily="34" charset="-120"/>
             </a:endParaRPr>
           </a:p>
         </p:txBody>
@@ -3898,7 +4232,7 @@
                 <a:latin typeface="微軟正黑體" pitchFamily="34" charset="-120"/>
                 <a:ea typeface="微軟正黑體" pitchFamily="34" charset="-120"/>
               </a:rPr>
-              <a:t>袮</a:t>
+              <a:t>祢</a:t>
             </a:r>
             <a:r>
               <a:rPr lang="zh-TW" altLang="en-US" sz="6400" b="1" dirty="0">
@@ -3932,6 +4266,78 @@
               </a:rPr>
               <a:t>鼓勵我   使我心裡有能力</a:t>
             </a:r>
+          </a:p>
+        </p:txBody>
+      </p:sp>
+      <p:sp>
+        <p:nvSpPr>
+          <p:cNvPr id="2" name="TextBox 1">
+            <a:extLst>
+              <a:ext uri="{FF2B5EF4-FFF2-40B4-BE49-F238E27FC236}">
+                <a16:creationId xmlns:a16="http://schemas.microsoft.com/office/drawing/2014/main" id="{CF912DAA-73F5-5634-555B-D2422E24304A}"/>
+              </a:ext>
+            </a:extLst>
+          </p:cNvPr>
+          <p:cNvSpPr txBox="1"/>
+          <p:nvPr/>
+        </p:nvSpPr>
+        <p:spPr>
+          <a:xfrm>
+            <a:off x="0" y="5157192"/>
+            <a:ext cx="12192000" cy="584775"/>
+          </a:xfrm>
+          <a:prstGeom prst="rect">
+            <a:avLst/>
+          </a:prstGeom>
+          <a:noFill/>
+        </p:spPr>
+        <p:txBody>
+          <a:bodyPr wrap="square" rtlCol="0">
+            <a:spAutoFit/>
+          </a:bodyPr>
+          <a:lstStyle/>
+          <a:p>
+            <a:pPr algn="ctr"/>
+            <a:r>
+              <a:rPr lang="en-US" sz="3200" b="1" dirty="0">
+                <a:solidFill>
+                  <a:srgbClr val="000066"/>
+                </a:solidFill>
+                <a:effectLst/>
+                <a:latin typeface="Microsoft JhengHei" panose="020B0604030504040204" pitchFamily="34" charset="-120"/>
+                <a:ea typeface="Microsoft JhengHei" panose="020B0604030504040204" pitchFamily="34" charset="-120"/>
+              </a:rPr>
+              <a:t>( </a:t>
+            </a:r>
+            <a:r>
+              <a:rPr lang="zh-CN" altLang="en-US" sz="3200" b="1" dirty="0">
+                <a:solidFill>
+                  <a:srgbClr val="000066"/>
+                </a:solidFill>
+                <a:effectLst/>
+                <a:latin typeface="Microsoft JhengHei" panose="020B0604030504040204" pitchFamily="34" charset="-120"/>
+                <a:ea typeface="Microsoft JhengHei" panose="020B0604030504040204" pitchFamily="34" charset="-120"/>
+              </a:rPr>
+              <a:t>副歌</a:t>
+            </a:r>
+            <a:r>
+              <a:rPr lang="en-US" sz="3200" b="1" dirty="0">
+                <a:solidFill>
+                  <a:srgbClr val="000066"/>
+                </a:solidFill>
+                <a:effectLst/>
+                <a:latin typeface="Microsoft JhengHei" panose="020B0604030504040204" pitchFamily="34" charset="-120"/>
+                <a:ea typeface="Microsoft JhengHei" panose="020B0604030504040204" pitchFamily="34" charset="-120"/>
+              </a:rPr>
+              <a:t> )</a:t>
+            </a:r>
+            <a:endParaRPr lang="vi-VN" sz="3200" b="1" dirty="0">
+              <a:solidFill>
+                <a:srgbClr val="000066"/>
+              </a:solidFill>
+              <a:effectLst/>
+              <a:ea typeface="Microsoft JhengHei" panose="020B0604030504040204" pitchFamily="34" charset="-120"/>
+            </a:endParaRPr>
           </a:p>
         </p:txBody>
       </p:sp>
@@ -3998,7 +4404,7 @@
                 <a:latin typeface="微軟正黑體" pitchFamily="34" charset="-120"/>
                 <a:ea typeface="微軟正黑體" pitchFamily="34" charset="-120"/>
               </a:rPr>
-              <a:t>袮</a:t>
+              <a:t>祢</a:t>
             </a:r>
             <a:r>
               <a:rPr lang="zh-TW" altLang="en-US" sz="6400" b="1" dirty="0">
@@ -4030,7 +4436,7 @@
                 <a:latin typeface="微軟正黑體" pitchFamily="34" charset="-120"/>
                 <a:ea typeface="微軟正黑體" pitchFamily="34" charset="-120"/>
               </a:rPr>
-              <a:t>袮</a:t>
+              <a:t>祢</a:t>
             </a:r>
             <a:r>
               <a:rPr lang="zh-TW" altLang="en-US" sz="6400" b="1" dirty="0">
@@ -4040,8 +4446,111 @@
                 <a:latin typeface="微軟正黑體" pitchFamily="34" charset="-120"/>
                 <a:ea typeface="微軟正黑體" pitchFamily="34" charset="-120"/>
               </a:rPr>
-              <a:t>必不離棄你手所創造的</a:t>
-            </a:r>
+              <a:t>必不離棄</a:t>
+            </a:r>
+            <a:r>
+              <a:rPr lang="zh-CN" altLang="en-US" sz="6400" b="1" dirty="0">
+                <a:solidFill>
+                  <a:srgbClr val="000066"/>
+                </a:solidFill>
+                <a:latin typeface="微軟正黑體" pitchFamily="34" charset="-120"/>
+                <a:ea typeface="微軟正黑體" pitchFamily="34" charset="-120"/>
+              </a:rPr>
+              <a:t>祢</a:t>
+            </a:r>
+            <a:r>
+              <a:rPr lang="zh-TW" altLang="en-US" sz="6400" b="1" dirty="0">
+                <a:solidFill>
+                  <a:srgbClr val="000066"/>
+                </a:solidFill>
+                <a:latin typeface="微軟正黑體" pitchFamily="34" charset="-120"/>
+                <a:ea typeface="微軟正黑體" pitchFamily="34" charset="-120"/>
+              </a:rPr>
+              <a:t>手所創造的</a:t>
+            </a:r>
+          </a:p>
+        </p:txBody>
+      </p:sp>
+      <p:sp>
+        <p:nvSpPr>
+          <p:cNvPr id="2" name="TextBox 1">
+            <a:extLst>
+              <a:ext uri="{FF2B5EF4-FFF2-40B4-BE49-F238E27FC236}">
+                <a16:creationId xmlns:a16="http://schemas.microsoft.com/office/drawing/2014/main" id="{5C0A43A9-C867-F4A9-096A-39F76B0B66EB}"/>
+              </a:ext>
+            </a:extLst>
+          </p:cNvPr>
+          <p:cNvSpPr txBox="1"/>
+          <p:nvPr/>
+        </p:nvSpPr>
+        <p:spPr>
+          <a:xfrm>
+            <a:off x="0" y="5157192"/>
+            <a:ext cx="12192000" cy="584775"/>
+          </a:xfrm>
+          <a:prstGeom prst="rect">
+            <a:avLst/>
+          </a:prstGeom>
+          <a:noFill/>
+        </p:spPr>
+        <p:txBody>
+          <a:bodyPr wrap="square" rtlCol="0">
+            <a:spAutoFit/>
+          </a:bodyPr>
+          <a:lstStyle/>
+          <a:p>
+            <a:pPr algn="ctr"/>
+            <a:r>
+              <a:rPr lang="en-US" sz="3200" b="1" dirty="0">
+                <a:solidFill>
+                  <a:srgbClr val="000066"/>
+                </a:solidFill>
+                <a:effectLst/>
+                <a:latin typeface="Microsoft JhengHei" panose="020B0604030504040204" pitchFamily="34" charset="-120"/>
+                <a:ea typeface="Microsoft JhengHei" panose="020B0604030504040204" pitchFamily="34" charset="-120"/>
+              </a:rPr>
+              <a:t>( </a:t>
+            </a:r>
+            <a:r>
+              <a:rPr lang="zh-CN" altLang="en-US" sz="3200" b="1">
+                <a:solidFill>
+                  <a:srgbClr val="000066"/>
+                </a:solidFill>
+                <a:effectLst/>
+                <a:latin typeface="Microsoft JhengHei" panose="020B0604030504040204" pitchFamily="34" charset="-120"/>
+                <a:ea typeface="Microsoft JhengHei" panose="020B0604030504040204" pitchFamily="34" charset="-120"/>
+              </a:rPr>
+              <a:t>結尾</a:t>
+            </a:r>
+            <a:r>
+              <a:rPr lang="en-US" sz="3200" b="1">
+                <a:solidFill>
+                  <a:srgbClr val="000066"/>
+                </a:solidFill>
+                <a:effectLst/>
+                <a:latin typeface="Microsoft JhengHei" panose="020B0604030504040204" pitchFamily="34" charset="-120"/>
+                <a:ea typeface="Microsoft JhengHei" panose="020B0604030504040204" pitchFamily="34" charset="-120"/>
+              </a:rPr>
+              <a:t> </a:t>
+            </a:r>
+            <a:r>
+              <a:rPr lang="en-US" sz="3200" b="1" dirty="0">
+                <a:solidFill>
+                  <a:srgbClr val="000066"/>
+                </a:solidFill>
+                <a:effectLst/>
+                <a:latin typeface="Microsoft JhengHei" panose="020B0604030504040204" pitchFamily="34" charset="-120"/>
+                <a:ea typeface="Microsoft JhengHei" panose="020B0604030504040204" pitchFamily="34" charset="-120"/>
+              </a:rPr>
+              <a:t>)</a:t>
+            </a:r>
+            <a:endParaRPr lang="vi-VN" sz="3200" b="1" dirty="0">
+              <a:solidFill>
+                <a:srgbClr val="000066"/>
+              </a:solidFill>
+              <a:effectLst/>
+              <a:ea typeface="Microsoft JhengHei" panose="020B0604030504040204" pitchFamily="34" charset="-120"/>
+            </a:endParaRPr>
           </a:p>
         </p:txBody>
       </p:sp>
